--- a/report/presentation_template.pptx
+++ b/report/presentation_template.pptx
@@ -215,7 +215,7 @@
           <a:p>
             <a:fld id="{BEFA587A-38EB-4614-822E-5EB92258F22F}" type="datetimeFigureOut">
               <a:rPr lang="zh-CN" altLang="en-US" smtClean="0"/>
-              <a:t>2026/3/16</a:t>
+              <a:t>2026/3/19</a:t>
             </a:fld>
             <a:endParaRPr lang="zh-CN" altLang="en-US"/>
           </a:p>
@@ -875,7 +875,7 @@
           <a:p>
             <a:fld id="{5BCAD085-E8A6-8845-BD4E-CB4CCA059FC4}" type="datetimeFigureOut">
               <a:rPr lang="en-US" smtClean="0"/>
-              <a:t>3/16/2026</a:t>
+              <a:t>3/19/2026</a:t>
             </a:fld>
             <a:endParaRPr lang="en-US"/>
           </a:p>
@@ -1040,7 +1040,7 @@
           <a:p>
             <a:fld id="{5BCAD085-E8A6-8845-BD4E-CB4CCA059FC4}" type="datetimeFigureOut">
               <a:rPr lang="en-US" smtClean="0"/>
-              <a:t>3/16/2026</a:t>
+              <a:t>3/19/2026</a:t>
             </a:fld>
             <a:endParaRPr lang="en-US"/>
           </a:p>
@@ -1215,7 +1215,7 @@
           <a:p>
             <a:fld id="{5BCAD085-E8A6-8845-BD4E-CB4CCA059FC4}" type="datetimeFigureOut">
               <a:rPr lang="en-US" smtClean="0"/>
-              <a:t>3/16/2026</a:t>
+              <a:t>3/19/2026</a:t>
             </a:fld>
             <a:endParaRPr lang="en-US"/>
           </a:p>
@@ -1380,7 +1380,7 @@
           <a:p>
             <a:fld id="{5BCAD085-E8A6-8845-BD4E-CB4CCA059FC4}" type="datetimeFigureOut">
               <a:rPr lang="en-US" smtClean="0"/>
-              <a:t>3/16/2026</a:t>
+              <a:t>3/19/2026</a:t>
             </a:fld>
             <a:endParaRPr lang="en-US"/>
           </a:p>
@@ -1621,7 +1621,7 @@
           <a:p>
             <a:fld id="{5BCAD085-E8A6-8845-BD4E-CB4CCA059FC4}" type="datetimeFigureOut">
               <a:rPr lang="en-US" smtClean="0"/>
-              <a:t>3/16/2026</a:t>
+              <a:t>3/19/2026</a:t>
             </a:fld>
             <a:endParaRPr lang="en-US"/>
           </a:p>
@@ -1848,7 +1848,7 @@
           <a:p>
             <a:fld id="{5BCAD085-E8A6-8845-BD4E-CB4CCA059FC4}" type="datetimeFigureOut">
               <a:rPr lang="en-US" smtClean="0"/>
-              <a:t>3/16/2026</a:t>
+              <a:t>3/19/2026</a:t>
             </a:fld>
             <a:endParaRPr lang="en-US"/>
           </a:p>
@@ -2210,7 +2210,7 @@
           <a:p>
             <a:fld id="{5BCAD085-E8A6-8845-BD4E-CB4CCA059FC4}" type="datetimeFigureOut">
               <a:rPr lang="en-US" smtClean="0"/>
-              <a:t>3/16/2026</a:t>
+              <a:t>3/19/2026</a:t>
             </a:fld>
             <a:endParaRPr lang="en-US"/>
           </a:p>
@@ -2323,7 +2323,7 @@
           <a:p>
             <a:fld id="{5BCAD085-E8A6-8845-BD4E-CB4CCA059FC4}" type="datetimeFigureOut">
               <a:rPr lang="en-US" smtClean="0"/>
-              <a:t>3/16/2026</a:t>
+              <a:t>3/19/2026</a:t>
             </a:fld>
             <a:endParaRPr lang="en-US"/>
           </a:p>
@@ -2413,7 +2413,7 @@
           <a:p>
             <a:fld id="{5BCAD085-E8A6-8845-BD4E-CB4CCA059FC4}" type="datetimeFigureOut">
               <a:rPr lang="en-US" smtClean="0"/>
-              <a:t>3/16/2026</a:t>
+              <a:t>3/19/2026</a:t>
             </a:fld>
             <a:endParaRPr lang="en-US"/>
           </a:p>
@@ -2685,7 +2685,7 @@
           <a:p>
             <a:fld id="{5BCAD085-E8A6-8845-BD4E-CB4CCA059FC4}" type="datetimeFigureOut">
               <a:rPr lang="en-US" smtClean="0"/>
-              <a:t>3/16/2026</a:t>
+              <a:t>3/19/2026</a:t>
             </a:fld>
             <a:endParaRPr lang="en-US"/>
           </a:p>
@@ -2937,7 +2937,7 @@
           <a:p>
             <a:fld id="{5BCAD085-E8A6-8845-BD4E-CB4CCA059FC4}" type="datetimeFigureOut">
               <a:rPr lang="en-US" smtClean="0"/>
-              <a:t>3/16/2026</a:t>
+              <a:t>3/19/2026</a:t>
             </a:fld>
             <a:endParaRPr lang="en-US"/>
           </a:p>
@@ -3145,7 +3145,7 @@
           <a:p>
             <a:fld id="{5BCAD085-E8A6-8845-BD4E-CB4CCA059FC4}" type="datetimeFigureOut">
               <a:rPr lang="en-US" smtClean="0"/>
-              <a:t>3/16/2026</a:t>
+              <a:t>3/19/2026</a:t>
             </a:fld>
             <a:endParaRPr lang="en-US"/>
           </a:p>
